--- a/05-content/prezentacii/grant-buhdesk/prezentaciya-grant-buhdesk-final.pptx
+++ b/05-content/prezentacii/grant-buhdesk/prezentaciya-grant-buhdesk-final.pptx
@@ -12740,8 +12740,8 @@
         </p:blipFill>
         <p:spPr>
           <a:xfrm>
-            <a:off x="10489803" y="8018209"/>
-            <a:ext cx="1590675" cy="1095375"/>
+            <a:off x="15243048" y="7818120"/>
+            <a:ext cx="1993392" cy="1371600"/>
           </a:xfrm>
           <a:prstGeom prst="rect">
             <a:avLst/>

--- a/05-content/prezentacii/grant-buhdesk/prezentaciya-grant-buhdesk-final.pptx
+++ b/05-content/prezentacii/grant-buhdesk/prezentaciya-grant-buhdesk-final.pptx
@@ -13315,6 +13315,11 @@
           <a:prstGeom prst="rect">
             <a:avLst/>
           </a:prstGeom>
+          <a:ln w="12700">
+            <a:solidFill>
+              <a:srgbClr val="D3D4CF"/>
+            </a:solidFill>
+          </a:ln>
         </p:spPr>
       </p:pic>
     </p:spTree>
@@ -15476,8 +15481,8 @@
         </p:nvSpPr>
         <p:spPr>
           <a:xfrm>
-            <a:off x="1047750" y="4431771"/>
-            <a:ext cx="3548063" cy="3566160"/>
+            <a:off x="1047750" y="1917171"/>
+            <a:ext cx="3548063" cy="2377440"/>
           </a:xfrm>
           <a:prstGeom prst="rect">
             <a:avLst/>
@@ -15496,7 +15501,7 @@
         </p:nvSpPr>
         <p:spPr>
           <a:xfrm>
-            <a:off x="1047750" y="4431771"/>
+            <a:off x="1047750" y="1917171"/>
             <a:ext cx="3548063" cy="33867"/>
           </a:xfrm>
           <a:prstGeom prst="rect">
@@ -15516,7 +15521,7 @@
         </p:nvSpPr>
         <p:spPr>
           <a:xfrm>
-            <a:off x="1352550" y="4846638"/>
+            <a:off x="1352550" y="2332038"/>
             <a:ext cx="3232309" cy="318029"/>
           </a:xfrm>
           <a:prstGeom prst="rect">
@@ -15560,7 +15565,7 @@
         </p:nvSpPr>
         <p:spPr>
           <a:xfrm>
-            <a:off x="1352550" y="5336117"/>
+            <a:off x="1352550" y="2821517"/>
             <a:ext cx="3026616" cy="1281113"/>
           </a:xfrm>
           <a:prstGeom prst="rect">
@@ -15604,7 +15609,7 @@
         </p:nvSpPr>
         <p:spPr>
           <a:xfrm>
-            <a:off x="4557713" y="5567098"/>
+            <a:off x="4557713" y="3052498"/>
             <a:ext cx="742950" cy="624814"/>
           </a:xfrm>
           <a:prstGeom prst="rect">
@@ -15648,8 +15653,8 @@
         </p:nvSpPr>
         <p:spPr>
           <a:xfrm>
-            <a:off x="5262563" y="4431771"/>
-            <a:ext cx="3548063" cy="3566160"/>
+            <a:off x="5262563" y="1917171"/>
+            <a:ext cx="3548063" cy="2377440"/>
           </a:xfrm>
           <a:prstGeom prst="rect">
             <a:avLst/>
@@ -15668,7 +15673,7 @@
         </p:nvSpPr>
         <p:spPr>
           <a:xfrm>
-            <a:off x="5262563" y="4431771"/>
+            <a:off x="5262563" y="1917171"/>
             <a:ext cx="3548063" cy="33867"/>
           </a:xfrm>
           <a:prstGeom prst="rect">
@@ -15688,7 +15693,7 @@
         </p:nvSpPr>
         <p:spPr>
           <a:xfrm>
-            <a:off x="5567363" y="4846638"/>
+            <a:off x="5567363" y="2332038"/>
             <a:ext cx="3232309" cy="318029"/>
           </a:xfrm>
           <a:prstGeom prst="rect">
@@ -15732,7 +15737,7 @@
         </p:nvSpPr>
         <p:spPr>
           <a:xfrm>
-            <a:off x="5567363" y="5336117"/>
+            <a:off x="5567363" y="2821517"/>
             <a:ext cx="3232309" cy="452438"/>
           </a:xfrm>
           <a:prstGeom prst="rect">
@@ -15776,7 +15781,7 @@
         </p:nvSpPr>
         <p:spPr>
           <a:xfrm>
-            <a:off x="8772525" y="5567098"/>
+            <a:off x="8772525" y="3052498"/>
             <a:ext cx="742950" cy="624814"/>
           </a:xfrm>
           <a:prstGeom prst="rect">
@@ -15820,8 +15825,8 @@
         </p:nvSpPr>
         <p:spPr>
           <a:xfrm>
-            <a:off x="9477375" y="4431771"/>
-            <a:ext cx="3548063" cy="3566160"/>
+            <a:off x="9477375" y="1917171"/>
+            <a:ext cx="3548063" cy="2377440"/>
           </a:xfrm>
           <a:prstGeom prst="rect">
             <a:avLst/>
@@ -15840,7 +15845,7 @@
         </p:nvSpPr>
         <p:spPr>
           <a:xfrm>
-            <a:off x="9477375" y="4431771"/>
+            <a:off x="9477375" y="1917171"/>
             <a:ext cx="3548063" cy="33867"/>
           </a:xfrm>
           <a:prstGeom prst="rect">
@@ -15860,7 +15865,7 @@
         </p:nvSpPr>
         <p:spPr>
           <a:xfrm>
-            <a:off x="9782175" y="4846638"/>
+            <a:off x="9782175" y="2332038"/>
             <a:ext cx="3232309" cy="318029"/>
           </a:xfrm>
           <a:prstGeom prst="rect">
@@ -15904,7 +15909,7 @@
         </p:nvSpPr>
         <p:spPr>
           <a:xfrm>
-            <a:off x="9782175" y="5336117"/>
+            <a:off x="9782175" y="2821517"/>
             <a:ext cx="3026616" cy="866775"/>
           </a:xfrm>
           <a:prstGeom prst="rect">
@@ -15948,7 +15953,7 @@
         </p:nvSpPr>
         <p:spPr>
           <a:xfrm>
-            <a:off x="12987338" y="5567098"/>
+            <a:off x="12987338" y="3052498"/>
             <a:ext cx="742950" cy="624814"/>
           </a:xfrm>
           <a:prstGeom prst="rect">
@@ -15992,8 +15997,8 @@
         </p:nvSpPr>
         <p:spPr>
           <a:xfrm>
-            <a:off x="13692188" y="4431771"/>
-            <a:ext cx="3548063" cy="3566160"/>
+            <a:off x="13692188" y="1917171"/>
+            <a:ext cx="3548063" cy="2377440"/>
           </a:xfrm>
           <a:prstGeom prst="rect">
             <a:avLst/>
@@ -16012,7 +16017,7 @@
         </p:nvSpPr>
         <p:spPr>
           <a:xfrm>
-            <a:off x="13692188" y="4431771"/>
+            <a:off x="13692188" y="1917171"/>
             <a:ext cx="3548063" cy="33867"/>
           </a:xfrm>
           <a:prstGeom prst="rect">
@@ -16032,7 +16037,7 @@
         </p:nvSpPr>
         <p:spPr>
           <a:xfrm>
-            <a:off x="13996988" y="4846638"/>
+            <a:off x="13996988" y="2332038"/>
             <a:ext cx="3232309" cy="318029"/>
           </a:xfrm>
           <a:prstGeom prst="rect">
@@ -16076,7 +16081,7 @@
         </p:nvSpPr>
         <p:spPr>
           <a:xfrm>
-            <a:off x="13996988" y="5336117"/>
+            <a:off x="13996988" y="2821517"/>
             <a:ext cx="3026616" cy="866775"/>
           </a:xfrm>
           <a:prstGeom prst="rect">
@@ -16220,6 +16225,64 @@
           </a:p>
         </p:txBody>
       </p:sp>
+      <p:pic>
+        <p:nvPicPr>
+          <p:cNvPr id="25" name="Picture 24" descr="image.png"/>
+          <p:cNvPicPr>
+            <a:picLocks noChangeAspect="1"/>
+          </p:cNvPicPr>
+          <p:nvPr/>
+        </p:nvPicPr>
+        <p:blipFill>
+          <a:blip r:embed="rId4"/>
+          <a:stretch>
+            <a:fillRect/>
+          </a:stretch>
+        </p:blipFill>
+        <p:spPr>
+          <a:xfrm>
+            <a:off x="4361688" y="4663440"/>
+            <a:ext cx="4928616" cy="4480560"/>
+          </a:xfrm>
+          <a:prstGeom prst="rect">
+            <a:avLst/>
+          </a:prstGeom>
+          <a:ln w="12700">
+            <a:solidFill>
+              <a:srgbClr val="D3D4CF"/>
+            </a:solidFill>
+          </a:ln>
+        </p:spPr>
+      </p:pic>
+      <p:pic>
+        <p:nvPicPr>
+          <p:cNvPr id="26" name="Picture 25" descr="image.png"/>
+          <p:cNvPicPr>
+            <a:picLocks noChangeAspect="1"/>
+          </p:cNvPicPr>
+          <p:nvPr/>
+        </p:nvPicPr>
+        <p:blipFill>
+          <a:blip r:embed="rId3"/>
+          <a:stretch>
+            <a:fillRect/>
+          </a:stretch>
+        </p:blipFill>
+        <p:spPr>
+          <a:xfrm>
+            <a:off x="9838944" y="4663440"/>
+            <a:ext cx="4087368" cy="4480560"/>
+          </a:xfrm>
+          <a:prstGeom prst="rect">
+            <a:avLst/>
+          </a:prstGeom>
+          <a:ln w="12700">
+            <a:solidFill>
+              <a:srgbClr val="D3D4CF"/>
+            </a:solidFill>
+          </a:ln>
+        </p:spPr>
+      </p:pic>
     </p:spTree>
   </p:cSld>
   <p:clrMapOvr>

--- a/05-content/prezentacii/grant-buhdesk/prezentaciya-grant-buhdesk-final.pptx
+++ b/05-content/prezentacii/grant-buhdesk/prezentaciya-grant-buhdesk-final.pptx
@@ -15788,6 +15788,10 @@
           </a:solidFill>
           <a:ln/>
         </p:spPr>
+        <p:txBody>
+          <a:bodyPr/>
+          <a:p/>
+        </p:txBody>
       </p:sp>
       <p:sp>
         <p:nvSpPr>
@@ -15798,7 +15802,7 @@
         <p:spPr>
           <a:xfrm>
             <a:off x="1581148" y="3805670"/>
-            <a:ext cx="10796381" cy="4724708"/>
+            <a:ext cx="16194024" cy="4724708"/>
           </a:xfrm>
           <a:prstGeom prst="rect">
             <a:avLst/>
@@ -15854,6 +15858,10 @@
           </a:solidFill>
           <a:ln/>
         </p:spPr>
+        <p:txBody>
+          <a:bodyPr/>
+          <a:p/>
+        </p:txBody>
       </p:sp>
       <p:sp>
         <p:nvSpPr>
@@ -15943,47 +15951,6 @@
           </a:p>
         </p:txBody>
       </p:sp>
-      <p:pic>
-        <p:nvPicPr>
-          <p:cNvPr id="2051" name="Picture 3" descr="C:\Users\User\Desktop\1+1\Сайт Бухдеск\images\tild6232-3031-4434-a366-343533376561__laptop-with-growing-.jpg"/>
-          <p:cNvPicPr>
-            <a:picLocks noChangeAspect="1" noChangeArrowheads="1"/>
-          </p:cNvPicPr>
-          <p:nvPr/>
-        </p:nvPicPr>
-        <p:blipFill>
-          <a:blip r:embed="rId3">
-            <a:extLst>
-              <a:ext uri="{28A0092B-C50C-407E-A947-70E740481C1C}">
-                <a14:useLocalDpi xmlns:a14="http://schemas.microsoft.com/office/drawing/2010/main" val="0"/>
-              </a:ext>
-            </a:extLst>
-          </a:blip>
-          <a:srcRect/>
-          <a:stretch>
-            <a:fillRect/>
-          </a:stretch>
-        </p:blipFill>
-        <p:spPr bwMode="auto">
-          <a:xfrm>
-            <a:off x="13020336" y="2425147"/>
-            <a:ext cx="3515912" cy="6445839"/>
-          </a:xfrm>
-          <a:prstGeom prst="rect">
-            <a:avLst/>
-          </a:prstGeom>
-          <a:noFill/>
-          <a:extLst>
-            <a:ext uri="{909E8E84-426E-40DD-AFC4-6F175D3DCCD1}">
-              <a14:hiddenFill xmlns:a14="http://schemas.microsoft.com/office/drawing/2010/main">
-                <a:solidFill>
-                  <a:srgbClr val="FFFFFF"/>
-                </a:solidFill>
-              </a14:hiddenFill>
-            </a:ext>
-          </a:extLst>
-        </p:spPr>
-      </p:pic>
     </p:spTree>
   </p:cSld>
   <p:clrMapOvr>

--- a/05-content/prezentacii/grant-buhdesk/prezentaciya-grant-buhdesk-final.pptx
+++ b/05-content/prezentacii/grant-buhdesk/prezentaciya-grant-buhdesk-final.pptx
@@ -13933,7 +13933,7 @@
         </p:blipFill>
         <p:spPr bwMode="auto">
           <a:xfrm>
-            <a:off x="11537950" y="1697090"/>
+            <a:off x="11244834" y="1697090"/>
             <a:ext cx="6000750" cy="6572250"/>
           </a:xfrm>
           <a:prstGeom prst="rect">
@@ -17164,8 +17164,8 @@
         </p:blipFill>
         <p:spPr bwMode="auto">
           <a:xfrm>
-            <a:off x="1047750" y="4758393"/>
-            <a:ext cx="15854978" cy="4651513"/>
+            <a:off x="1051560" y="4438739"/>
+            <a:ext cx="16194024" cy="4750981"/>
           </a:xfrm>
           <a:prstGeom prst="rect">
             <a:avLst/>
